--- a/Sicurezza Parte 2, Presentazione.pptx
+++ b/Sicurezza Parte 2, Presentazione.pptx
@@ -118,37 +118,37 @@
   <p:extLst>
     <p:ext uri="{521415D9-36F7-43E2-AB2F-B90AF26B5E84}">
       <p14:sectionLst xmlns:p14="http://schemas.microsoft.com/office/powerpoint/2010/main">
-        <p14:section name="Apertura" id="{01053656-c02a-271a-21e7-6b80e4c1bf2d}">
+        <p14:section name="Apertura" id="{2652b6d1-bc28-29cf-1f02-b2be7887af47}">
           <p14:sldIdLst>
             <p14:sldId id="256"/>
             <p14:sldId id="257"/>
           </p14:sldIdLst>
         </p14:section>
-        <p14:section name="Perché" id="{ac386e4e-bdd5-9d21-41a0-dd8f9a1b7164}">
+        <p14:section name="Perché" id="{00fccf22-6ba5-6beb-cf1e-c3384f4e9e16}">
           <p14:sldIdLst>
             <p14:sldId id="258"/>
             <p14:sldId id="259"/>
             <p14:sldId id="260"/>
           </p14:sldIdLst>
         </p14:section>
-        <p14:section name="Regole chiave" id="{d96e6c36-bcee-42c8-0c21-b99d4bdd9e6a}">
+        <p14:section name="Regole chiave" id="{673f2eaf-2d8e-b859-63fd-75a10fe1217f}">
           <p14:sldIdLst>
             <p14:sldId id="261"/>
             <p14:sldId id="262"/>
           </p14:sldIdLst>
         </p14:section>
-        <p14:section name="Il materiale" id="{da1b56a0-568a-ed29-a48d-71fe9aeb6117}">
+        <p14:section name="Il materiale" id="{12f74413-f0a2-6aaf-1853-477b96133ae8}">
           <p14:sldIdLst>
             <p14:sldId id="263"/>
           </p14:sldIdLst>
         </p14:section>
-        <p14:section name="Adesso" id="{16c24999-4ec1-e1e8-0f58-e43f4d307ab4}">
+        <p14:section name="Adesso" id="{edcce4d4-2219-e092-c348-f4727c667e94}">
           <p14:sldIdLst>
             <p14:sldId id="264"/>
             <p14:sldId id="265"/>
           </p14:sldIdLst>
         </p14:section>
-        <p14:section name="Chiusura" id="{83c6f030-f539-1f8c-3a6c-eaec3844789b}">
+        <p14:section name="Chiusura" id="{3995f6d3-5d4b-ed1a-2a58-a9cbcfbdfa90}">
           <p14:sldIdLst>
             <p14:sldId id="266"/>
             <p14:sldId id="267"/>
@@ -646,7 +646,7 @@
           <a:p>
             <a:r>
               <a:rPr lang="en-US" dirty="0"/>
-              <a:t>Il materiale è un file da aprire nel browser, funziona anche senza internet. Mostrate dal vivo dove sono l’interruttore della lingua, il menu dei capitoli e la checklist. Il programma è indicativo: decidetelo con il vostro responsabile.</a:t>
+              <a:t>Il materiale si apre da un link nel browser, anche dal telefono, e non serve nessun account. Mostrate dal vivo dove sono l’interruttore della lingua, il menu dei capitoli e la checklist. Il programma è indicativo: decidetelo con il vostro responsabile.</a:t>
             </a:r>
             <a:endParaRPr lang="en-US" dirty="0"/>
           </a:p>
@@ -3350,7 +3350,7 @@
                 <a:ea typeface="Arial" pitchFamily="34" charset="-122"/>
                 <a:cs typeface="Arial" pitchFamily="34" charset="-120"/>
               </a:rPr>
-              <a:t>Apri il file nel browser, anche dal telefono</a:t>
+              <a:t>Apri il link nel browser, anche dal telefono</a:t>
             </a:r>
             <a:endParaRPr lang="en-US" sz="1500" dirty="0"/>
           </a:p>

--- a/Sicurezza Parte 2, Presentazione.pptx
+++ b/Sicurezza Parte 2, Presentazione.pptx
@@ -118,37 +118,37 @@
   <p:extLst>
     <p:ext uri="{521415D9-36F7-43E2-AB2F-B90AF26B5E84}">
       <p14:sectionLst xmlns:p14="http://schemas.microsoft.com/office/powerpoint/2010/main">
-        <p14:section name="Apertura" id="{2652b6d1-bc28-29cf-1f02-b2be7887af47}">
+        <p14:section name="Apertura" id="{360d0b18-1c87-7e00-88ae-b70bf739db2d}">
           <p14:sldIdLst>
             <p14:sldId id="256"/>
             <p14:sldId id="257"/>
           </p14:sldIdLst>
         </p14:section>
-        <p14:section name="Perché" id="{00fccf22-6ba5-6beb-cf1e-c3384f4e9e16}">
+        <p14:section name="Perché" id="{372a6eff-70ef-fb36-ee55-838001a5709b}">
           <p14:sldIdLst>
             <p14:sldId id="258"/>
             <p14:sldId id="259"/>
             <p14:sldId id="260"/>
           </p14:sldIdLst>
         </p14:section>
-        <p14:section name="Regole chiave" id="{673f2eaf-2d8e-b859-63fd-75a10fe1217f}">
+        <p14:section name="Regole chiave" id="{86aece30-31f5-31fa-773e-f4e38d4e70e9}">
           <p14:sldIdLst>
             <p14:sldId id="261"/>
             <p14:sldId id="262"/>
           </p14:sldIdLst>
         </p14:section>
-        <p14:section name="Il materiale" id="{12f74413-f0a2-6aaf-1853-477b96133ae8}">
+        <p14:section name="Il materiale" id="{7217411a-a05c-356a-a5d4-63c9f84a2b5a}">
           <p14:sldIdLst>
             <p14:sldId id="263"/>
           </p14:sldIdLst>
         </p14:section>
-        <p14:section name="Adesso" id="{edcce4d4-2219-e092-c348-f4727c667e94}">
+        <p14:section name="Adesso" id="{ce0a8de8-8870-ef3d-9ebb-074d4d9fd7b6}">
           <p14:sldIdLst>
             <p14:sldId id="264"/>
             <p14:sldId id="265"/>
           </p14:sldIdLst>
         </p14:section>
-        <p14:section name="Chiusura" id="{3995f6d3-5d4b-ed1a-2a58-a9cbcfbdfa90}">
+        <p14:section name="Chiusura" id="{9be2e2f5-b7a2-36aa-1385-1e4253f8874c}">
           <p14:sldIdLst>
             <p14:sldId id="266"/>
             <p14:sldId id="267"/>
@@ -558,7 +558,7 @@
           <a:p>
             <a:r>
               <a:rPr lang="en-US" dirty="0"/>
-              <a:t>La Parte 1 riguardava te come persona. La Parte 2 riguarda il lavoro: le regole che valgono per tutti in azienda e cosa fare quando succede qualcosa. È obbligatoria per tutti, collaboratori esterni compresi. Anche qui: oggi l’introduzione, il dettaglio è nel materiale.</a:t>
+              <a:t>La Parte 1 riguardava te come persona. La Parte 2 riguarda il lavoro: le regole uguali per tutti in azienda e cosa fare quando succede qualcosa. È obbligatoria per tutti, collaboratori esterni compresi. Anche qui: oggi l’introduzione, il dettaglio è nel materiale.</a:t>
             </a:r>
             <a:endParaRPr lang="en-US" dirty="0"/>
           </a:p>
@@ -734,7 +734,7 @@
           <a:p>
             <a:r>
               <a:rPr lang="en-US" dirty="0"/>
-              <a:t>Tre frasi da ricordare. Le regole sono uguali per tutti e servono a non dover decidere da soli sotto pressione. Se succede qualcosa, segnalare subito è sempre la scelta giusta.</a:t>
+              <a:t>Tre frasi da ricordare. Le regole sono uguali per tutti e servono a non decidere da soli sotto pressione. Se succede qualcosa, segnalare subito è sempre giusto.</a:t>
             </a:r>
             <a:endParaRPr lang="en-US" dirty="0"/>
           </a:p>
@@ -910,7 +910,7 @@
           <a:p>
             <a:r>
               <a:rPr lang="en-US" dirty="0"/>
-              <a:t>Tre blocchi. Le regole sono poche e pratiche. I processi dicono cosa fare passo per passo, così nessuno deve improvvisare. Le policy sono la versione formale, da leggere e firmare. Tutto è allineato alla norma ISO 27001 e alla nuova legge svizzera sulla protezione dei dati.</a:t>
+              <a:t>Tre blocchi. Le regole sono poche e pratiche. I processi dicono cosa fare passo per passo, così nessuno improvvisa. Le policy sono la versione formale, da leggere e firmare. Tutto allineato alla norma ISO 27001 e alla nuova legge svizzera sulla protezione dei dati.</a:t>
             </a:r>
             <a:endParaRPr lang="en-US" dirty="0"/>
           </a:p>
@@ -1086,7 +1086,7 @@
           <a:p>
             <a:r>
               <a:rPr lang="en-US" dirty="0"/>
-              <a:t>A sinistra il perimetro che gestiscono i tecnici: server, posta aziendale, backup. A destra il tuo: telefono, password, cosa clicchi, cosa dici al telefono. Si incontrano nel tuo account aziendale, e le chiavi le hai tu. E attenzione: per la nuova legge sulla protezione dei dati la multa, fino a 250’000 franchi, di regola colpisce la persona responsabile, per violazioni intenzionali.</a:t>
+              <a:t>A sinistra il perimetro che gestiscono i tecnici: server, posta aziendale, backup. A destra il tuo: telefono, password, cosa clicchi, cosa dici al telefono. Si incontrano nel tuo account aziendale, e le chiavi le hai tu. Attenzione: per la nuova legge sulla protezione dei dati la multa, fino a 250’000 franchi, colpisce di regola la persona responsabile, per violazioni intenzionali.</a:t>
             </a:r>
             <a:endParaRPr lang="en-US" dirty="0"/>
           </a:p>
@@ -1174,7 +1174,7 @@
           <a:p>
             <a:r>
               <a:rPr lang="en-US" dirty="0"/>
-              <a:t>Arup è una grande società di ingegneria. Il dipendente aveva anche sospettato qualcosa, ma vedere in video persone che conosceva lo ha convinto. Con l’AI oggi si falsificano voce e volto. Per questo la regola non si basa su chi vedi o senti, ma su una verifica fatta da te, su un canale che controlli tu, più una seconda firma.</a:t>
+              <a:t>Arup è una grande società di ingegneria. Il dipendente aveva sospettato qualcosa, ma vedere in video persone che conosceva lo ha convinto. Con l’AI oggi si falsificano voce e volto. Per questo la regola non si basa su chi vedi o senti, ma su una verifica fatta da te, su un canale che controlli tu, più una seconda firma.</a:t>
             </a:r>
             <a:endParaRPr lang="en-US" dirty="0"/>
           </a:p>
@@ -1438,7 +1438,7 @@
           <a:p>
             <a:r>
               <a:rPr lang="en-US" dirty="0"/>
-              <a:t>La sezione A sono le regole, divise per argomento. La sezione B i processi: cosa fare se succede, il setup guidato dei dispositivi con 12 guide per Mac, Windows, iPhone e Android, e cosa cambia quando si entra, si cambia ruolo o si esce. La sezione C le policy, la checklist e il test.</a:t>
+              <a:t>Sezione A: le regole, per argomento. Sezione B: i processi, cioè cosa fare se succede, il setup guidato dei dispositivi con 12 guide per Mac, Windows, iPhone e Android, e cosa cambia quando si entra, si cambia ruolo o si esce. Sezione C: policy, checklist e test.</a:t>
             </a:r>
             <a:endParaRPr lang="en-US" dirty="0"/>
           </a:p>
@@ -4965,7 +4965,7 @@
         </p:nvSpPr>
         <p:spPr>
           <a:xfrm>
-            <a:off x="685800" y="5989320"/>
+            <a:off x="685800" y="5760720"/>
             <a:ext cx="10820095" cy="256032"/>
           </a:xfrm>
           <a:prstGeom prst="rect">
@@ -4993,6 +4993,45 @@
               <a:t>Tutte le fonti, con i link, sono anche nell’ultimo capitolo del materiale.</a:t>
             </a:r>
             <a:endParaRPr lang="en-US" sz="1100" dirty="0"/>
+          </a:p>
+        </p:txBody>
+      </p:sp>
+      <p:sp>
+        <p:nvSpPr>
+          <p:cNvPr id="9" name="Crediti"/>
+          <p:cNvSpPr txBox="1"/>
+          <p:nvPr/>
+        </p:nvSpPr>
+        <p:spPr>
+          <a:xfrm>
+            <a:off x="685800" y="6016752"/>
+            <a:ext cx="10820095" cy="329184"/>
+          </a:xfrm>
+          <a:prstGeom prst="rect">
+            <a:avLst/>
+          </a:prstGeom>
+          <a:noFill/>
+          <a:ln/>
+        </p:spPr>
+        <p:txBody>
+          <a:bodyPr wrap="square" lIns="0" tIns="0" rIns="0" bIns="0" rtlCol="0" anchor="t"/>
+          <a:lstStyle/>
+          <a:p>
+            <a:pPr indent="0" marL="0">
+              <a:buNone/>
+            </a:pPr>
+            <a:r>
+              <a:rPr lang="en-US" sz="1000" dirty="0">
+                <a:solidFill>
+                  <a:schemeClr val="accent6"/>
+                </a:solidFill>
+                <a:latin typeface="Arial" pitchFamily="34" charset="0"/>
+                <a:ea typeface="Arial" pitchFamily="34" charset="-122"/>
+                <a:cs typeface="Arial" pitchFamily="34" charset="-120"/>
+              </a:rPr>
+              <a:t>© 2026 Aron Clementi. Materiale formativo a scopo informativo: non sostituisce una consulenza legale o tecnica né le regole della tua azienda. Fonti verificate alla data indicata; strumenti e prezzi cambiano.</a:t>
+            </a:r>
+            <a:endParaRPr lang="en-US" sz="1000" dirty="0"/>
           </a:p>
         </p:txBody>
       </p:sp>
@@ -5932,7 +5971,7 @@
                 <a:ea typeface="Arial" pitchFamily="34" charset="-122"/>
                 <a:cs typeface="Arial" pitchFamily="34" charset="-120"/>
               </a:rPr>
-              <a:t>Con una regola chiara non devi improvvisare: se qualcuno ti mette fretta, la risposta è già scritta.</a:t>
+              <a:t>Con una regola chiara non improvvisi: se qualcuno ti mette fretta, la risposta è già scritta.</a:t>
             </a:r>
             <a:endParaRPr lang="en-US" sz="2000" dirty="0"/>
           </a:p>

--- a/Sicurezza Parte 2, Presentazione.pptx
+++ b/Sicurezza Parte 2, Presentazione.pptx
@@ -118,37 +118,37 @@
   <p:extLst>
     <p:ext uri="{521415D9-36F7-43E2-AB2F-B90AF26B5E84}">
       <p14:sectionLst xmlns:p14="http://schemas.microsoft.com/office/powerpoint/2010/main">
-        <p14:section name="Apertura" id="{360d0b18-1c87-7e00-88ae-b70bf739db2d}">
+        <p14:section name="Apertura" id="{cfb46973-c238-175d-b2e0-08e6b95ccd16}">
           <p14:sldIdLst>
             <p14:sldId id="256"/>
             <p14:sldId id="257"/>
           </p14:sldIdLst>
         </p14:section>
-        <p14:section name="Perché" id="{372a6eff-70ef-fb36-ee55-838001a5709b}">
+        <p14:section name="Perché" id="{8cba01bc-4c51-5c86-4193-0bb3675c5d50}">
           <p14:sldIdLst>
             <p14:sldId id="258"/>
             <p14:sldId id="259"/>
             <p14:sldId id="260"/>
           </p14:sldIdLst>
         </p14:section>
-        <p14:section name="Regole chiave" id="{86aece30-31f5-31fa-773e-f4e38d4e70e9}">
+        <p14:section name="Regole chiave" id="{93713ef6-e9aa-ab68-9087-49d795a69c60}">
           <p14:sldIdLst>
             <p14:sldId id="261"/>
             <p14:sldId id="262"/>
           </p14:sldIdLst>
         </p14:section>
-        <p14:section name="Il materiale" id="{7217411a-a05c-356a-a5d4-63c9f84a2b5a}">
+        <p14:section name="Il materiale" id="{af310136-b446-74d9-0771-48b5ca04abd8}">
           <p14:sldIdLst>
             <p14:sldId id="263"/>
           </p14:sldIdLst>
         </p14:section>
-        <p14:section name="Adesso" id="{ce0a8de8-8870-ef3d-9ebb-074d4d9fd7b6}">
+        <p14:section name="Adesso" id="{71aa9825-0468-fa15-3685-73ef08b6209e}">
           <p14:sldIdLst>
             <p14:sldId id="264"/>
             <p14:sldId id="265"/>
           </p14:sldIdLst>
         </p14:section>
-        <p14:section name="Chiusura" id="{9be2e2f5-b7a2-36aa-1385-1e4253f8874c}">
+        <p14:section name="Chiusura" id="{b83e4cec-f083-d21a-16ee-4935b60f8d5c}">
           <p14:sldIdLst>
             <p14:sldId id="266"/>
             <p14:sldId id="267"/>
@@ -3991,7 +3991,7 @@
                 <a:ea typeface="Arial" pitchFamily="34" charset="-122"/>
                 <a:cs typeface="Arial" pitchFamily="34" charset="-120"/>
               </a:rPr>
-              <a:t>Checklist da 20 punti, test e policy firmate. Dopo, AI Parte 1: AI al lavoro.</a:t>
+              <a:t>Checklist da 20 punti, test e Dichiarazione firmata. Dopo, AI Parte 1: AI al lavoro.</a:t>
             </a:r>
             <a:endParaRPr lang="en-US" sz="1500" dirty="0"/>
           </a:p>
@@ -11306,7 +11306,7 @@
                 <a:ea typeface="Arial" pitchFamily="34" charset="-122"/>
                 <a:cs typeface="Arial" pitchFamily="34" charset="-120"/>
               </a:rPr>
-              <a:t>checklist da 20 punti, test da 10 domande e policy firmate.</a:t>
+              <a:t>checklist da 20 punti, test da 10 domande e Dichiarazione firmata.</a:t>
             </a:r>
             <a:endParaRPr lang="en-US" sz="1600" dirty="0"/>
           </a:p>

--- a/Sicurezza Parte 2, Presentazione.pptx
+++ b/Sicurezza Parte 2, Presentazione.pptx
@@ -118,37 +118,37 @@
   <p:extLst>
     <p:ext uri="{521415D9-36F7-43E2-AB2F-B90AF26B5E84}">
       <p14:sectionLst xmlns:p14="http://schemas.microsoft.com/office/powerpoint/2010/main">
-        <p14:section name="Apertura" id="{cfb46973-c238-175d-b2e0-08e6b95ccd16}">
+        <p14:section name="Apertura" id="{14aae75d-e512-8871-8e9e-bfea8a2e4bd1}">
           <p14:sldIdLst>
             <p14:sldId id="256"/>
             <p14:sldId id="257"/>
           </p14:sldIdLst>
         </p14:section>
-        <p14:section name="Perché" id="{8cba01bc-4c51-5c86-4193-0bb3675c5d50}">
+        <p14:section name="Perché" id="{afa3b15b-45e0-23e6-b013-46404a2227f8}">
           <p14:sldIdLst>
             <p14:sldId id="258"/>
             <p14:sldId id="259"/>
             <p14:sldId id="260"/>
           </p14:sldIdLst>
         </p14:section>
-        <p14:section name="Regole chiave" id="{93713ef6-e9aa-ab68-9087-49d795a69c60}">
+        <p14:section name="Regole chiave" id="{d12d9139-9ee2-c7bb-4732-8288c3e72873}">
           <p14:sldIdLst>
             <p14:sldId id="261"/>
             <p14:sldId id="262"/>
           </p14:sldIdLst>
         </p14:section>
-        <p14:section name="Il materiale" id="{af310136-b446-74d9-0771-48b5ca04abd8}">
+        <p14:section name="Il materiale" id="{7a8a1a7a-41f3-5716-3af2-ce80193d80ab}">
           <p14:sldIdLst>
             <p14:sldId id="263"/>
           </p14:sldIdLst>
         </p14:section>
-        <p14:section name="Adesso" id="{71aa9825-0468-fa15-3685-73ef08b6209e}">
+        <p14:section name="Adesso" id="{f5f175b3-8482-099e-a15e-2ec45942cedf}">
           <p14:sldIdLst>
             <p14:sldId id="264"/>
             <p14:sldId id="265"/>
           </p14:sldIdLst>
         </p14:section>
-        <p14:section name="Chiusura" id="{b83e4cec-f083-d21a-16ee-4935b60f8d5c}">
+        <p14:section name="Chiusura" id="{19a36f15-b2a1-b50c-0a7c-07bacc9fff9c}">
           <p14:sldIdLst>
             <p14:sldId id="266"/>
             <p14:sldId id="267"/>
@@ -3991,7 +3991,7 @@
                 <a:ea typeface="Arial" pitchFamily="34" charset="-122"/>
                 <a:cs typeface="Arial" pitchFamily="34" charset="-120"/>
               </a:rPr>
-              <a:t>Checklist da 20 punti, test e Dichiarazione firmata. Dopo, AI Parte 1: AI al lavoro.</a:t>
+              <a:t>Checklist da 20 punti, test e le 12 policy. Dopo, AI Parte 1: AI al lavoro.</a:t>
             </a:r>
             <a:endParaRPr lang="en-US" sz="1500" dirty="0"/>
           </a:p>
@@ -11306,7 +11306,7 @@
                 <a:ea typeface="Arial" pitchFamily="34" charset="-122"/>
                 <a:cs typeface="Arial" pitchFamily="34" charset="-120"/>
               </a:rPr>
-              <a:t>checklist da 20 punti, test da 10 domande e Dichiarazione firmata.</a:t>
+              <a:t>checklist da 20 punti, test da 10 domande e le 12 policy.</a:t>
             </a:r>
             <a:endParaRPr lang="en-US" sz="1600" dirty="0"/>
           </a:p>

--- a/Sicurezza Parte 2, Presentazione.pptx
+++ b/Sicurezza Parte 2, Presentazione.pptx
@@ -118,37 +118,37 @@
   <p:extLst>
     <p:ext uri="{521415D9-36F7-43E2-AB2F-B90AF26B5E84}">
       <p14:sectionLst xmlns:p14="http://schemas.microsoft.com/office/powerpoint/2010/main">
-        <p14:section name="Apertura" id="{14aae75d-e512-8871-8e9e-bfea8a2e4bd1}">
+        <p14:section name="Apertura" id="{3e9fd324-5ca7-5961-c1b3-a28034471cb1}">
           <p14:sldIdLst>
             <p14:sldId id="256"/>
             <p14:sldId id="257"/>
           </p14:sldIdLst>
         </p14:section>
-        <p14:section name="Perché" id="{afa3b15b-45e0-23e6-b013-46404a2227f8}">
+        <p14:section name="Perché" id="{9f963294-aa62-b425-e78e-a35692771051}">
           <p14:sldIdLst>
             <p14:sldId id="258"/>
             <p14:sldId id="259"/>
             <p14:sldId id="260"/>
           </p14:sldIdLst>
         </p14:section>
-        <p14:section name="Regole chiave" id="{d12d9139-9ee2-c7bb-4732-8288c3e72873}">
+        <p14:section name="Regole chiave" id="{8c0120e9-14b6-6caa-31e2-cb2fbf67e9a7}">
           <p14:sldIdLst>
             <p14:sldId id="261"/>
             <p14:sldId id="262"/>
           </p14:sldIdLst>
         </p14:section>
-        <p14:section name="Il materiale" id="{7a8a1a7a-41f3-5716-3af2-ce80193d80ab}">
+        <p14:section name="Il materiale" id="{11bb8235-3b60-8187-0ff6-19302f69b496}">
           <p14:sldIdLst>
             <p14:sldId id="263"/>
           </p14:sldIdLst>
         </p14:section>
-        <p14:section name="Adesso" id="{f5f175b3-8482-099e-a15e-2ec45942cedf}">
+        <p14:section name="Adesso" id="{bdc59b01-20f3-a014-dc6d-f170aa237efd}">
           <p14:sldIdLst>
             <p14:sldId id="264"/>
             <p14:sldId id="265"/>
           </p14:sldIdLst>
         </p14:section>
-        <p14:section name="Chiusura" id="{19a36f15-b2a1-b50c-0a7c-07bacc9fff9c}">
+        <p14:section name="Chiusura" id="{2a983b9f-69c9-f5c4-60b1-419e162329bf}">
           <p14:sldIdLst>
             <p14:sldId id="266"/>
             <p14:sldId id="267"/>

--- a/Sicurezza Parte 2, Presentazione.pptx
+++ b/Sicurezza Parte 2, Presentazione.pptx
@@ -118,37 +118,37 @@
   <p:extLst>
     <p:ext uri="{521415D9-36F7-43E2-AB2F-B90AF26B5E84}">
       <p14:sectionLst xmlns:p14="http://schemas.microsoft.com/office/powerpoint/2010/main">
-        <p14:section name="Apertura" id="{3e9fd324-5ca7-5961-c1b3-a28034471cb1}">
+        <p14:section name="Apertura" id="{4f49b1ff-53a7-771c-51dc-8aa74d52e135}">
           <p14:sldIdLst>
             <p14:sldId id="256"/>
             <p14:sldId id="257"/>
           </p14:sldIdLst>
         </p14:section>
-        <p14:section name="Perché" id="{9f963294-aa62-b425-e78e-a35692771051}">
+        <p14:section name="Perché" id="{01c7ba38-c350-436c-a1f0-fec1d94f1889}">
           <p14:sldIdLst>
             <p14:sldId id="258"/>
             <p14:sldId id="259"/>
             <p14:sldId id="260"/>
           </p14:sldIdLst>
         </p14:section>
-        <p14:section name="Regole chiave" id="{8c0120e9-14b6-6caa-31e2-cb2fbf67e9a7}">
+        <p14:section name="Regole chiave" id="{db4bd647-a6b9-f5cd-2b2c-a51e12adff18}">
           <p14:sldIdLst>
             <p14:sldId id="261"/>
             <p14:sldId id="262"/>
           </p14:sldIdLst>
         </p14:section>
-        <p14:section name="Il materiale" id="{11bb8235-3b60-8187-0ff6-19302f69b496}">
+        <p14:section name="Il materiale" id="{87cc3121-158f-712b-a5e1-a83abfb34203}">
           <p14:sldIdLst>
             <p14:sldId id="263"/>
           </p14:sldIdLst>
         </p14:section>
-        <p14:section name="Adesso" id="{bdc59b01-20f3-a014-dc6d-f170aa237efd}">
+        <p14:section name="Adesso" id="{f8235499-4869-656c-4a00-5072ad1dc1f9}">
           <p14:sldIdLst>
             <p14:sldId id="264"/>
             <p14:sldId id="265"/>
           </p14:sldIdLst>
         </p14:section>
-        <p14:section name="Chiusura" id="{2a983b9f-69c9-f5c4-60b1-419e162329bf}">
+        <p14:section name="Chiusura" id="{ebbb62ff-4e57-4eed-5d01-fcbcc80aabc9}">
           <p14:sldIdLst>
             <p14:sldId id="266"/>
             <p14:sldId id="267"/>

--- a/Sicurezza Parte 2, Presentazione.pptx
+++ b/Sicurezza Parte 2, Presentazione.pptx
@@ -118,37 +118,37 @@
   <p:extLst>
     <p:ext uri="{521415D9-36F7-43E2-AB2F-B90AF26B5E84}">
       <p14:sectionLst xmlns:p14="http://schemas.microsoft.com/office/powerpoint/2010/main">
-        <p14:section name="Apertura" id="{4f49b1ff-53a7-771c-51dc-8aa74d52e135}">
+        <p14:section name="Apertura" id="{214a79a6-680b-6c97-cb48-142c179c2961}">
           <p14:sldIdLst>
             <p14:sldId id="256"/>
             <p14:sldId id="257"/>
           </p14:sldIdLst>
         </p14:section>
-        <p14:section name="Perché" id="{01c7ba38-c350-436c-a1f0-fec1d94f1889}">
+        <p14:section name="Perché" id="{3d45f41f-a15a-655b-cc9b-53642dc29121}">
           <p14:sldIdLst>
             <p14:sldId id="258"/>
             <p14:sldId id="259"/>
             <p14:sldId id="260"/>
           </p14:sldIdLst>
         </p14:section>
-        <p14:section name="Regole chiave" id="{db4bd647-a6b9-f5cd-2b2c-a51e12adff18}">
+        <p14:section name="Regole chiave" id="{4f8257b0-034e-25b4-e522-f7cf4ad64d95}">
           <p14:sldIdLst>
             <p14:sldId id="261"/>
             <p14:sldId id="262"/>
           </p14:sldIdLst>
         </p14:section>
-        <p14:section name="Il materiale" id="{87cc3121-158f-712b-a5e1-a83abfb34203}">
+        <p14:section name="Il materiale" id="{be58ed6c-00b9-bdcf-7477-090fa28b55b6}">
           <p14:sldIdLst>
             <p14:sldId id="263"/>
           </p14:sldIdLst>
         </p14:section>
-        <p14:section name="Adesso" id="{f8235499-4869-656c-4a00-5072ad1dc1f9}">
+        <p14:section name="Adesso" id="{87526afb-8d57-087e-b7d7-102daaf276cf}">
           <p14:sldIdLst>
             <p14:sldId id="264"/>
             <p14:sldId id="265"/>
           </p14:sldIdLst>
         </p14:section>
-        <p14:section name="Chiusura" id="{ebbb62ff-4e57-4eed-5d01-fcbcc80aabc9}">
+        <p14:section name="Chiusura" id="{ce1a4a39-b1a0-bdfa-7688-bce2b471272c}">
           <p14:sldIdLst>
             <p14:sldId id="266"/>
             <p14:sldId id="267"/>
